--- a/docs/demo/mcp-intro/AI助手使用指南-业务人员.pptx
+++ b/docs/demo/mcp-intro/AI助手使用指南-业务人员.pptx
@@ -6322,8 +6322,8 @@
         </p:blipFill>
         <p:spPr>
           <a:xfrm>
-            <a:off x="457200" y="1166774"/>
-            <a:ext cx="8229600" cy="3189427"/>
+            <a:off x="457200" y="869594"/>
+            <a:ext cx="8229600" cy="3782873"/>
           </a:xfrm>
           <a:prstGeom prst="rect">
             <a:avLst/>
@@ -6561,8 +6561,8 @@
         </p:blipFill>
         <p:spPr>
           <a:xfrm>
-            <a:off x="457200" y="982066"/>
-            <a:ext cx="8229600" cy="3559759"/>
+            <a:off x="457200" y="863194"/>
+            <a:ext cx="8229600" cy="3796589"/>
           </a:xfrm>
           <a:prstGeom prst="rect">
             <a:avLst/>
@@ -7278,8 +7278,8 @@
         </p:blipFill>
         <p:spPr>
           <a:xfrm>
-            <a:off x="457200" y="884225"/>
-            <a:ext cx="8229600" cy="3754526"/>
+            <a:off x="457200" y="860450"/>
+            <a:ext cx="8229600" cy="3802075"/>
           </a:xfrm>
           <a:prstGeom prst="rect">
             <a:avLst/>
@@ -8811,8 +8811,8 @@
         </p:blipFill>
         <p:spPr>
           <a:xfrm>
-            <a:off x="457200" y="1017727"/>
-            <a:ext cx="8229600" cy="3487522"/>
+            <a:off x="457200" y="850392"/>
+            <a:ext cx="8229600" cy="3821278"/>
           </a:xfrm>
           <a:prstGeom prst="rect">
             <a:avLst/>
